--- a/Focus Session 11/Slides_Tutorial.pptx
+++ b/Focus Session 11/Slides_Tutorial.pptx
@@ -273,7 +273,7 @@
           <a:p>
             <a:fld id="{D05F0EE0-DD46-4FD2-9F16-3C92C451ECE5}" type="datetimeFigureOut">
               <a:rPr lang="en-US" smtClean="0"/>
-              <a:t>7/14/2025</a:t>
+              <a:t>7/26/2025</a:t>
             </a:fld>
             <a:endParaRPr lang="en-US"/>
           </a:p>
@@ -799,7 +799,7 @@
           <a:p>
             <a:fld id="{E8772974-4CF7-4A7D-B82A-C0289E6E5454}" type="datetime1">
               <a:rPr lang="en-US" smtClean="0"/>
-              <a:t>7/14/2025</a:t>
+              <a:t>7/26/2025</a:t>
             </a:fld>
             <a:endParaRPr lang="en-US"/>
           </a:p>
@@ -962,7 +962,7 @@
           <a:p>
             <a:fld id="{741E744C-0FCE-432D-80FB-3F06B0CACFAE}" type="datetime1">
               <a:rPr lang="en-US" smtClean="0"/>
-              <a:t>7/14/2025</a:t>
+              <a:t>7/26/2025</a:t>
             </a:fld>
             <a:endParaRPr lang="en-US"/>
           </a:p>
@@ -1135,7 +1135,7 @@
           <a:p>
             <a:fld id="{580026B9-8515-4A2F-B96E-6F9F6400EACF}" type="datetime1">
               <a:rPr lang="en-US" smtClean="0"/>
-              <a:t>7/14/2025</a:t>
+              <a:t>7/26/2025</a:t>
             </a:fld>
             <a:endParaRPr lang="en-US"/>
           </a:p>
@@ -1323,7 +1323,7 @@
           <a:p>
             <a:fld id="{03CBB80D-C1B1-4EB9-AEF9-AA3EBA818191}" type="datetime1">
               <a:rPr lang="en-US" smtClean="0"/>
-              <a:t>7/14/2025</a:t>
+              <a:t>7/26/2025</a:t>
             </a:fld>
             <a:endParaRPr lang="en-US"/>
           </a:p>
@@ -1563,7 +1563,7 @@
           <a:p>
             <a:fld id="{F113CCD1-B06D-4D07-B644-B7AC74D6B8AB}" type="datetime1">
               <a:rPr lang="en-US" smtClean="0"/>
-              <a:t>7/14/2025</a:t>
+              <a:t>7/26/2025</a:t>
             </a:fld>
             <a:endParaRPr lang="en-US"/>
           </a:p>
@@ -1787,7 +1787,7 @@
           <a:p>
             <a:fld id="{091681DC-7236-4E4D-BF6C-A4CEB5118DC9}" type="datetime1">
               <a:rPr lang="en-US" smtClean="0"/>
-              <a:t>7/14/2025</a:t>
+              <a:t>7/26/2025</a:t>
             </a:fld>
             <a:endParaRPr lang="en-US"/>
           </a:p>
@@ -2146,7 +2146,7 @@
           <a:p>
             <a:fld id="{833869AB-54E7-4032-89F6-D218F1A24059}" type="datetime1">
               <a:rPr lang="en-US" smtClean="0"/>
-              <a:t>7/14/2025</a:t>
+              <a:t>7/26/2025</a:t>
             </a:fld>
             <a:endParaRPr lang="en-US"/>
           </a:p>
@@ -2258,7 +2258,7 @@
           <a:p>
             <a:fld id="{5A55A3DD-14CE-44E3-A91F-7AECBEE8F0BF}" type="datetime1">
               <a:rPr lang="en-US" smtClean="0"/>
-              <a:t>7/14/2025</a:t>
+              <a:t>7/26/2025</a:t>
             </a:fld>
             <a:endParaRPr lang="en-US"/>
           </a:p>
@@ -2348,7 +2348,7 @@
           <a:p>
             <a:fld id="{899DCBA8-A0FD-43B6-A688-B148736640E4}" type="datetime1">
               <a:rPr lang="en-US" smtClean="0"/>
-              <a:t>7/14/2025</a:t>
+              <a:t>7/26/2025</a:t>
             </a:fld>
             <a:endParaRPr lang="en-US"/>
           </a:p>
@@ -2618,7 +2618,7 @@
           <a:p>
             <a:fld id="{0CCDAB1C-7DA5-4E25-B72C-8B5DF611E1C9}" type="datetime1">
               <a:rPr lang="en-US" smtClean="0"/>
-              <a:t>7/14/2025</a:t>
+              <a:t>7/26/2025</a:t>
             </a:fld>
             <a:endParaRPr lang="en-US"/>
           </a:p>
@@ -2865,7 +2865,7 @@
           <a:p>
             <a:fld id="{3A9DAF1E-69A1-483D-B81C-DECE9F9EF009}" type="datetime1">
               <a:rPr lang="en-US" smtClean="0"/>
-              <a:t>7/14/2025</a:t>
+              <a:t>7/26/2025</a:t>
             </a:fld>
             <a:endParaRPr lang="en-US"/>
           </a:p>
@@ -3071,7 +3071,7 @@
           <a:p>
             <a:fld id="{15DFE20A-9B32-4756-A74D-96CE5582F381}" type="datetime1">
               <a:rPr lang="en-US" smtClean="0"/>
-              <a:t>7/14/2025</a:t>
+              <a:t>7/26/2025</a:t>
             </a:fld>
             <a:endParaRPr lang="en-US"/>
           </a:p>
@@ -5882,7 +5882,7 @@
         </p:nvSpPr>
         <p:spPr>
           <a:xfrm>
-            <a:off x="709295" y="5382260"/>
+            <a:off x="638175" y="5339715"/>
             <a:ext cx="4798695" cy="1168400"/>
           </a:xfrm>
           <a:prstGeom prst="rect">
@@ -7231,7 +7231,7 @@
               <a:buNone/>
             </a:pPr>
             <a:r>
-              <a:rPr lang="en-US" altLang="zh-CN" sz="1400"/>
+              <a:rPr lang="en-US" altLang="zh-CN" sz="1400" dirty="0"/>
               <a:t>Split 70% of data for training/validation and 30% for testing </a:t>
             </a:r>
           </a:p>
@@ -7242,7 +7242,7 @@
               <a:buNone/>
             </a:pPr>
             <a:r>
-              <a:rPr lang="en-US" altLang="zh-CN" sz="1400"/>
+              <a:rPr lang="en-US" altLang="zh-CN" sz="1400" dirty="0"/>
               <a:t>Further split the training/validation set to get approximately 20% for validation</a:t>
             </a:r>
           </a:p>
@@ -11743,13 +11743,13 @@
           <a:lstStyle/>
           <a:p>
             <a:r>
-              <a:rPr lang="en-US" altLang="zh-CN" sz="1600"/>
+              <a:rPr lang="en-US" altLang="zh-CN" sz="1600" dirty="0"/>
               <a:t>λ:The regularization strength parameter. Larger λ values impose stronger penalties, further shrinking parameter values and reducing model complexity.</a:t>
             </a:r>
           </a:p>
           <a:p>
             <a:r>
-              <a:rPr lang="en-US" altLang="zh-CN" sz="1600"/>
+              <a:rPr lang="en-US" altLang="zh-CN" sz="1600" dirty="0"/>
               <a:t>ρ:The mixing parameter that determines the relative weights of L1(lasso) and L2(ridge) penalties:</a:t>
             </a:r>
           </a:p>
@@ -11759,7 +11759,7 @@
               <a:buNone/>
             </a:pPr>
             <a:r>
-              <a:rPr lang="en-US" altLang="zh-CN" sz="1600"/>
+              <a:rPr lang="en-US" altLang="zh-CN" sz="1600" dirty="0"/>
               <a:t>When ρ=0, only L1 penalty is retained, resulting in pure lasso regression, which achieves feature selection by shrinking some parameters to exactly zero.</a:t>
             </a:r>
           </a:p>
@@ -11769,13 +11769,13 @@
               <a:buNone/>
             </a:pPr>
             <a:r>
-              <a:rPr lang="en-US" altLang="zh-CN" sz="1600"/>
+              <a:rPr lang="en-US" altLang="zh-CN" sz="1600" dirty="0"/>
               <a:t>When ρ=1, only L2 penalty is retained, resulting in pure ridge regression, which reduces parameter magnitudes without driving them to zero.</a:t>
             </a:r>
           </a:p>
           <a:p>
             <a:r>
-              <a:rPr lang="en-US" altLang="zh-CN" sz="1600"/>
+              <a:rPr lang="en-US" altLang="zh-CN" sz="1600" dirty="0"/>
               <a:t>P:The number of predictors or features.</a:t>
             </a:r>
           </a:p>
@@ -25340,7 +25340,7 @@
           <a:lstStyle/>
           <a:p>
             <a:r>
-              <a:rPr lang="en-US" altLang="zh-CN" sz="1600"/>
+              <a:rPr lang="en-US" altLang="zh-CN" sz="1600" dirty="0"/>
               <a:t>Figure 1 shows an example with two predictors, “size” and “b/m.” The left panel describes how the tree assigns each observation to a partition based on its predictor values. First, observations are sorted on size. Those above the breakpoint of 0.5 are assigned to Category 3. Those with small size are then further sorted by b/m. Observations with small size and b/m below 0.3 are assigned to Category 1, while those with b/m above 0.3 go into Category 2. Finally, forecasts for observations in each partition are defined as the simple average of the outcome variable’s value among observations in that partition.</a:t>
             </a:r>
           </a:p>
@@ -36166,7 +36166,7 @@
           <a:lstStyle/>
           <a:p>
             <a:r>
-              <a:rPr lang="en-US" altLang="zh-CN" sz="1200" b="1"/>
+              <a:rPr lang="en-US" altLang="zh-CN" sz="1200" b="1" dirty="0"/>
               <a:t>Baseline Models:</a:t>
             </a:r>
           </a:p>
@@ -36176,20 +36176,36 @@
               <a:buNone/>
             </a:pPr>
             <a:r>
-              <a:rPr lang="en-US" altLang="zh-CN" sz="1200" b="1"/>
-              <a:t>OLS with All Covariates</a:t>
-            </a:r>
-            <a:r>
-              <a:rPr lang="en-US" altLang="zh-CN" sz="1200"/>
-              <a:t>:Predictive R</a:t>
-            </a:r>
-            <a:r>
-              <a:rPr lang="en-US" altLang="zh-CN" sz="1200" baseline="30000"/>
+              <a:rPr lang="en-US" altLang="zh-CN" sz="1200" b="1" dirty="0"/>
+              <a:t>OLS with All </a:t>
+            </a:r>
+            <a:r>
+              <a:rPr lang="en-US" altLang="zh-CN" sz="1200" b="1" dirty="0" err="1"/>
+              <a:t>Covariates</a:t>
+            </a:r>
+            <a:r>
+              <a:rPr lang="en-US" altLang="zh-CN" sz="1200" dirty="0" err="1"/>
+              <a:t>:Predictive</a:t>
+            </a:r>
+            <a:r>
+              <a:rPr lang="en-US" altLang="zh-CN" sz="1200" dirty="0"/>
+              <a:t> R</a:t>
+            </a:r>
+            <a:r>
+              <a:rPr lang="en-US" altLang="zh-CN" sz="1200" baseline="30000" dirty="0"/>
               <a:t>2</a:t>
             </a:r>
             <a:r>
-              <a:rPr lang="en-US" altLang="zh-CN" sz="1200"/>
-              <a:t>=−3.46% for the entire pooled sample.This poor performance reflects severe overfitting due to the high dimensionality of predictors (920 features) and lack of regularization.</a:t>
+              <a:rPr lang="en-US" altLang="zh-CN" sz="1200" dirty="0"/>
+              <a:t>=−3.46% for the entire pooled </a:t>
+            </a:r>
+            <a:r>
+              <a:rPr lang="en-US" altLang="zh-CN" sz="1200" dirty="0" err="1"/>
+              <a:t>sample.This</a:t>
+            </a:r>
+            <a:r>
+              <a:rPr lang="en-US" altLang="zh-CN" sz="1200" dirty="0"/>
+              <a:t> poor performance reflects severe overfitting due to the high dimensionality of predictors (920 features) and lack of regularization.</a:t>
             </a:r>
           </a:p>
           <a:p>
@@ -36198,19 +36214,19 @@
               <a:buNone/>
             </a:pPr>
             <a:r>
-              <a:rPr lang="en-US" altLang="zh-CN" sz="1200" b="1"/>
+              <a:rPr lang="en-US" altLang="zh-CN" sz="1200" b="1" dirty="0"/>
               <a:t>OLS-3 (Size, Book-to-Market, Momentum)</a:t>
             </a:r>
             <a:r>
-              <a:rPr lang="en-US" altLang="zh-CN" sz="1200"/>
+              <a:rPr lang="en-US" altLang="zh-CN" sz="1200" dirty="0"/>
               <a:t>:Predictive R</a:t>
             </a:r>
             <a:r>
-              <a:rPr lang="en-US" altLang="zh-CN" sz="1200" baseline="30000"/>
+              <a:rPr lang="en-US" altLang="zh-CN" sz="1200" baseline="30000" dirty="0"/>
               <a:t>2</a:t>
             </a:r>
             <a:r>
-              <a:rPr lang="en-US" altLang="zh-CN" sz="1200"/>
+              <a:rPr lang="en-US" altLang="zh-CN" sz="1200" dirty="0"/>
               <a:t>=0.16% demonstrating substantial improvement by using only three robust predictors.</a:t>
             </a:r>
           </a:p>
@@ -36220,13 +36236,13 @@
               <a:buNone/>
             </a:pPr>
             <a:r>
-              <a:rPr lang="en-US" altLang="zh-CN" sz="1200"/>
+              <a:rPr lang="en-US" altLang="zh-CN" sz="1200" dirty="0"/>
               <a:t>These results confirm that naive OLS fails in high-dimensional settings but performs modestly well with limited predictors.</a:t>
             </a:r>
           </a:p>
           <a:p>
             <a:r>
-              <a:rPr lang="en-US" altLang="zh-CN" sz="1200" b="1"/>
+              <a:rPr lang="en-US" altLang="zh-CN" sz="1200" b="1" dirty="0"/>
               <a:t>Regularized Linear Models:</a:t>
             </a:r>
           </a:p>
@@ -36236,19 +36252,19 @@
               <a:buNone/>
             </a:pPr>
             <a:r>
-              <a:rPr lang="en-US" altLang="zh-CN" sz="1200" b="1"/>
+              <a:rPr lang="en-US" altLang="zh-CN" sz="1200" b="1" dirty="0"/>
               <a:t>Elastic Net (ENet)</a:t>
             </a:r>
             <a:r>
-              <a:rPr lang="en-US" altLang="zh-CN" sz="1200"/>
+              <a:rPr lang="en-US" altLang="zh-CN" sz="1200" dirty="0"/>
               <a:t>:R</a:t>
             </a:r>
             <a:r>
-              <a:rPr lang="en-US" altLang="zh-CN" sz="1200" baseline="30000"/>
+              <a:rPr lang="en-US" altLang="zh-CN" sz="1200" baseline="30000" dirty="0"/>
               <a:t>2</a:t>
             </a:r>
             <a:r>
-              <a:rPr lang="en-US" altLang="zh-CN" sz="1200"/>
+              <a:rPr lang="en-US" altLang="zh-CN" sz="1200" dirty="0"/>
               <a:t>=0.11%. By penalizing coefficients, ENet mitigates overfitting, providing better predictions than full OLS but still limited due to its linear nature.</a:t>
             </a:r>
           </a:p>
@@ -36258,41 +36274,49 @@
               <a:buNone/>
             </a:pPr>
             <a:r>
-              <a:rPr lang="en-US" altLang="zh-CN" sz="1200" b="1"/>
+              <a:rPr lang="en-US" altLang="zh-CN" sz="1200" b="1" dirty="0"/>
               <a:t>Partial Least Squares (PLS)</a:t>
             </a:r>
             <a:r>
-              <a:rPr lang="en-US" altLang="zh-CN" sz="1200"/>
+              <a:rPr lang="en-US" altLang="zh-CN" sz="1200" dirty="0"/>
               <a:t> and </a:t>
             </a:r>
             <a:r>
-              <a:rPr lang="en-US" altLang="zh-CN" sz="1200" b="1"/>
+              <a:rPr lang="en-US" altLang="zh-CN" sz="1200" b="1" dirty="0"/>
               <a:t>Principal Components Regression (PCR)</a:t>
             </a:r>
             <a:r>
-              <a:rPr lang="en-US" altLang="zh-CN" sz="1200"/>
+              <a:rPr lang="en-US" altLang="zh-CN" sz="1200" dirty="0"/>
               <a:t>:R</a:t>
             </a:r>
             <a:r>
-              <a:rPr lang="en-US" altLang="zh-CN" sz="1200" baseline="30000"/>
+              <a:rPr lang="en-US" altLang="zh-CN" sz="1200" baseline="30000" dirty="0"/>
               <a:t>2</a:t>
             </a:r>
             <a:r>
-              <a:rPr lang="en-US" altLang="zh-CN" sz="1200"/>
+              <a:rPr lang="en-US" altLang="zh-CN" sz="1200" dirty="0"/>
               <a:t>=0.27% and R</a:t>
             </a:r>
             <a:r>
-              <a:rPr lang="en-US" altLang="zh-CN" sz="1200" baseline="30000"/>
+              <a:rPr lang="en-US" altLang="zh-CN" sz="1200" baseline="30000" dirty="0"/>
               <a:t>2</a:t>
             </a:r>
             <a:r>
-              <a:rPr lang="en-US" altLang="zh-CN" sz="1200"/>
-              <a:t>=0.26%, respectively.These dimension-reduction techniques outperform penalized regression by condensing noisy predictors into a few informative components.</a:t>
-            </a:r>
-          </a:p>
-          <a:p>
-            <a:r>
-              <a:rPr lang="en-US" altLang="zh-CN" sz="1200" b="1"/>
+              <a:rPr lang="en-US" altLang="zh-CN" sz="1200" dirty="0"/>
+              <a:t>=0.26%, </a:t>
+            </a:r>
+            <a:r>
+              <a:rPr lang="en-US" altLang="zh-CN" sz="1200" dirty="0" err="1"/>
+              <a:t>respectively.These</a:t>
+            </a:r>
+            <a:r>
+              <a:rPr lang="en-US" altLang="zh-CN" sz="1200" dirty="0"/>
+              <a:t> dimension-reduction techniques outperform penalized regression by condensing noisy predictors into a few informative components.</a:t>
+            </a:r>
+          </a:p>
+          <a:p>
+            <a:r>
+              <a:rPr lang="en-US" altLang="zh-CN" sz="1200" b="1" dirty="0"/>
               <a:t>Nonlinear Models:</a:t>
             </a:r>
           </a:p>
@@ -36302,27 +36326,27 @@
               <a:buNone/>
             </a:pPr>
             <a:r>
-              <a:rPr lang="en-US" altLang="zh-CN" sz="1200" b="1"/>
+              <a:rPr lang="en-US" altLang="zh-CN" sz="1200" b="1" dirty="0"/>
               <a:t>Random Forest (RF) and Gradient Boosted Regression Trees (GBRT): </a:t>
             </a:r>
             <a:r>
-              <a:rPr lang="en-US" altLang="zh-CN" sz="1200"/>
+              <a:rPr lang="en-US" altLang="zh-CN" sz="1200" dirty="0"/>
               <a:t>R</a:t>
             </a:r>
             <a:r>
-              <a:rPr lang="en-US" altLang="zh-CN" sz="1200" baseline="30000"/>
+              <a:rPr lang="en-US" altLang="zh-CN" sz="1200" baseline="30000" dirty="0"/>
               <a:t>2</a:t>
             </a:r>
             <a:r>
-              <a:rPr lang="en-US" altLang="zh-CN" sz="1200"/>
+              <a:rPr lang="en-US" altLang="zh-CN" sz="1200" dirty="0"/>
               <a:t>=0.33% and R</a:t>
             </a:r>
             <a:r>
-              <a:rPr lang="en-US" altLang="zh-CN" sz="1200" baseline="30000"/>
+              <a:rPr lang="en-US" altLang="zh-CN" sz="1200" baseline="30000" dirty="0"/>
               <a:t>2</a:t>
             </a:r>
             <a:r>
-              <a:rPr lang="en-US" altLang="zh-CN" sz="1200"/>
+              <a:rPr lang="en-US" altLang="zh-CN" sz="1200" dirty="0"/>
               <a:t>=0.34%, respectively. These models leverage nonlinearities and interactions among predictors, yielding better predictive performance.</a:t>
             </a:r>
           </a:p>
@@ -36332,25 +36356,25 @@
               <a:buNone/>
             </a:pPr>
             <a:r>
-              <a:rPr lang="en-US" altLang="zh-CN" sz="1200" b="1"/>
+              <a:rPr lang="en-US" altLang="zh-CN" sz="1200" b="1" dirty="0"/>
               <a:t>Neural Networks (NN1-NN5): </a:t>
             </a:r>
             <a:r>
-              <a:rPr lang="en-US" altLang="zh-CN" sz="1200"/>
+              <a:rPr lang="en-US" altLang="zh-CN" sz="1200" dirty="0"/>
               <a:t>Performance improves with increasing network complexity, peaking at R</a:t>
             </a:r>
             <a:r>
-              <a:rPr lang="en-US" altLang="zh-CN" sz="1200" baseline="30000"/>
+              <a:rPr lang="en-US" altLang="zh-CN" sz="1200" baseline="30000" dirty="0"/>
               <a:t>2</a:t>
             </a:r>
             <a:r>
-              <a:rPr lang="en-US" altLang="zh-CN" sz="1200"/>
+              <a:rPr lang="en-US" altLang="zh-CN" sz="1200" dirty="0"/>
               <a:t>=0.40% for NN3 (three hidden layers).Models with four or five layers show diminishing returns, likely due to the low signal-to-noise ratio in stock returns data.</a:t>
             </a:r>
           </a:p>
           <a:p>
             <a:r>
-              <a:rPr lang="en-US" altLang="zh-CN" sz="1200" b="1"/>
+              <a:rPr lang="en-US" altLang="zh-CN" sz="1200" b="1" dirty="0"/>
               <a:t>Subsample Results:</a:t>
             </a:r>
           </a:p>
@@ -36360,7 +36384,7 @@
               <a:buNone/>
             </a:pPr>
             <a:r>
-              <a:rPr lang="en-US" altLang="zh-CN" sz="1200"/>
+              <a:rPr lang="en-US" altLang="zh-CN" sz="1200" dirty="0"/>
               <a:t>Predictions are broken down by large-cap (top-1,000 stocks) and small-cap (bottom-1,000 stocks) subsamples.</a:t>
             </a:r>
           </a:p>
@@ -36370,15 +36394,15 @@
               <a:buNone/>
             </a:pPr>
             <a:r>
-              <a:rPr lang="en-US" altLang="zh-CN" sz="1200"/>
+              <a:rPr lang="en-US" altLang="zh-CN" sz="1200" dirty="0"/>
               <a:t>Nonlinear models (trees and neural networks) achieve the best performance in both cases, with higher R</a:t>
             </a:r>
             <a:r>
-              <a:rPr lang="en-US" altLang="zh-CN" sz="1200" baseline="30000"/>
+              <a:rPr lang="en-US" altLang="zh-CN" sz="1200" baseline="30000" dirty="0"/>
               <a:t>2</a:t>
             </a:r>
             <a:r>
-              <a:rPr lang="en-US" altLang="zh-CN" sz="1200"/>
+              <a:rPr lang="en-US" altLang="zh-CN" sz="1200" dirty="0"/>
               <a:t> values for large-cap stocks (up to 0.70% for NN3).</a:t>
             </a:r>
           </a:p>
@@ -36388,7 +36412,7 @@
               <a:buNone/>
             </a:pPr>
             <a:r>
-              <a:rPr lang="en-US" altLang="zh-CN" sz="1200"/>
+              <a:rPr lang="en-US" altLang="zh-CN" sz="1200" dirty="0"/>
               <a:t>This result supports the hypothesis that machine learning models excel in predicting returns for larger, more liquid stocks.</a:t>
             </a:r>
           </a:p>
@@ -37918,7 +37942,7 @@
                     <a:lstStyle/>
                     <a:p>
                       <a:pPr algn="l" fontAlgn="b"/>
-                      <a:endParaRPr sz="1100" b="0" i="0">
+                      <a:endParaRPr sz="1100" b="0" i="0" dirty="0">
                         <a:solidFill>
                           <a:srgbClr val="000000"/>
                         </a:solidFill>
@@ -38508,7 +38532,7 @@
                     <a:p>
                       <a:pPr algn="r" fontAlgn="b"/>
                       <a:r>
-                        <a:rPr lang="en-US" altLang="zh-CN" sz="1100" b="0" i="0">
+                        <a:rPr lang="en-US" altLang="zh-CN" sz="1100" b="0" i="0" dirty="0">
                           <a:solidFill>
                             <a:srgbClr val="000000"/>
                           </a:solidFill>
@@ -40544,41 +40568,65 @@
           <a:lstStyle/>
           <a:p>
             <a:r>
-              <a:rPr lang="en-US" altLang="zh-CN" sz="1200" b="1"/>
-              <a:t>Linear vs. Constrained Linear Models:</a:t>
-            </a:r>
-            <a:r>
-              <a:rPr lang="en-US" altLang="zh-CN" sz="1200"/>
-              <a:t>Unconstrained OLS significantly underperforms compared to constrained linear models such as OLS-3, PLS, PCR, and Elastic Net (ENet). The addition of regularization or dimension reduction leads to substantial predictive improvements over the naïve OLS model.</a:t>
-            </a:r>
-          </a:p>
-          <a:p>
-            <a:r>
-              <a:rPr lang="en-US" altLang="zh-CN" sz="1200" b="1"/>
-              <a:t>Comparison Among Linear Models:</a:t>
-            </a:r>
-            <a:r>
-              <a:rPr lang="en-US" altLang="zh-CN" sz="1200"/>
-              <a:t>Differences between penalized linear methods (ENet) and dimension reduction techniques (PLS and PCR) are minimal, with no clear dominance of one approach over the other. This suggests that both strategies effectively mitigate overfitting and capture predictive signals.</a:t>
-            </a:r>
-          </a:p>
-          <a:p>
-            <a:r>
-              <a:rPr lang="en-US" altLang="zh-CN" sz="1200" b="1"/>
+              <a:rPr lang="en-US" altLang="zh-CN" sz="1200" b="1" dirty="0"/>
+              <a:t>Linear vs. Constrained Linear </a:t>
+            </a:r>
+            <a:r>
+              <a:rPr lang="en-US" altLang="zh-CN" sz="1200" b="1" dirty="0" err="1"/>
+              <a:t>Models:</a:t>
+            </a:r>
+            <a:r>
+              <a:rPr lang="en-US" altLang="zh-CN" sz="1200" dirty="0" err="1"/>
+              <a:t>Unconstrained</a:t>
+            </a:r>
+            <a:r>
+              <a:rPr lang="en-US" altLang="zh-CN" sz="1200" dirty="0"/>
+              <a:t> OLS significantly underperforms compared to constrained linear models such as OLS-3, PLS, PCR, and Elastic Net (ENet). The addition of regularization or dimension reduction leads to substantial predictive improvements over the naïve OLS model.</a:t>
+            </a:r>
+          </a:p>
+          <a:p>
+            <a:r>
+              <a:rPr lang="en-US" altLang="zh-CN" sz="1200" b="1" dirty="0"/>
+              <a:t>Comparison Among Linear </a:t>
+            </a:r>
+            <a:r>
+              <a:rPr lang="en-US" altLang="zh-CN" sz="1200" b="1" dirty="0" err="1"/>
+              <a:t>Models:</a:t>
+            </a:r>
+            <a:r>
+              <a:rPr lang="en-US" altLang="zh-CN" sz="1200" dirty="0" err="1"/>
+              <a:t>Differences</a:t>
+            </a:r>
+            <a:r>
+              <a:rPr lang="en-US" altLang="zh-CN" sz="1200" dirty="0"/>
+              <a:t> between penalized linear methods (ENet) and dimension reduction techniques (PLS and PCR) are minimal, with no clear dominance of one approach over the other. This suggests that both strategies effectively mitigate overfitting and capture predictive signals.</a:t>
+            </a:r>
+          </a:p>
+          <a:p>
+            <a:r>
+              <a:rPr lang="en-US" altLang="zh-CN" sz="1200" b="1" dirty="0"/>
               <a:t>Nonlinear Methods vs. Linear Methods: </a:t>
             </a:r>
             <a:r>
-              <a:rPr lang="en-US" altLang="zh-CN" sz="1200"/>
-              <a:t>Tree-based models, such as Random Forest (RF) and Gradient Boosted Regression Trees (GBRT), generally outperform linear models. However, the statistical significance of these improvements is marginal.Neural networks (NNs) consistently and significantly outperform linear and generalized linear models, showcasing the value of allowing for complex interactions and nonlinear relationships.</a:t>
-            </a:r>
-          </a:p>
-          <a:p>
-            <a:r>
-              <a:rPr lang="en-US" altLang="zh-CN" sz="1200" b="1"/>
+              <a:rPr lang="en-US" altLang="zh-CN" sz="1200" dirty="0"/>
+              <a:t>Tree-based models, such as Random Forest (RF) and Gradient Boosted Regression Trees (GBRT), generally outperform linear models. However, the statistical significance of these improvements is </a:t>
+            </a:r>
+            <a:r>
+              <a:rPr lang="en-US" altLang="zh-CN" sz="1200" dirty="0" err="1"/>
+              <a:t>marginal.Neural</a:t>
+            </a:r>
+            <a:r>
+              <a:rPr lang="en-US" altLang="zh-CN" sz="1200" dirty="0"/>
+              <a:t> networks (NNs) consistently and significantly outperform linear and generalized linear models, showcasing the value of allowing for complex interactions and nonlinear relationships.</a:t>
+            </a:r>
+          </a:p>
+          <a:p>
+            <a:r>
+              <a:rPr lang="en-US" altLang="zh-CN" sz="1200" b="1" dirty="0"/>
               <a:t>Neural Networks vs. Tree-Based Models: </a:t>
             </a:r>
             <a:r>
-              <a:rPr lang="en-US" altLang="zh-CN" sz="1200"/>
+              <a:rPr lang="en-US" altLang="zh-CN" sz="1200" dirty="0"/>
               <a:t>Neural networks improve upon tree-based methods, though the differences are not statistically significant at the 5% level. This highlights the nuanced trade-offs between model flexibility and overfitting.</a:t>
             </a:r>
           </a:p>
@@ -40611,7 +40659,7 @@
               <a:buFontTx/>
             </a:pPr>
             <a:r>
-              <a:rPr lang="en-US" altLang="zh-CN" sz="1200"/>
+              <a:rPr lang="en-US" altLang="zh-CN" sz="1200" dirty="0"/>
               <a:t>Table 3 evaluates the statistical significance of performance differences between machine learning models using Diebold-Mariano (DM) test statistics. The table facilitates a pairwise comparison of predictive accuracy, where:</a:t>
             </a:r>
           </a:p>
@@ -40621,7 +40669,7 @@
               <a:buSzTx/>
               <a:buFontTx/>
             </a:pPr>
-            <a:endParaRPr lang="en-US" altLang="zh-CN" sz="1200"/>
+            <a:endParaRPr lang="en-US" altLang="zh-CN" sz="1200" dirty="0"/>
           </a:p>
           <a:p>
             <a:pPr algn="l">
@@ -40630,7 +40678,7 @@
               <a:buFontTx/>
             </a:pPr>
             <a:r>
-              <a:rPr lang="en-US" altLang="zh-CN" sz="1200"/>
+              <a:rPr lang="en-US" altLang="zh-CN" sz="1200" dirty="0"/>
               <a:t>Positive values indicate the column model outperforms the row model.</a:t>
             </a:r>
           </a:p>
@@ -40640,7 +40688,7 @@
               <a:buSzTx/>
               <a:buFontTx/>
             </a:pPr>
-            <a:endParaRPr lang="en-US" altLang="zh-CN" sz="1200"/>
+            <a:endParaRPr lang="en-US" altLang="zh-CN" sz="1200" dirty="0"/>
           </a:p>
           <a:p>
             <a:pPr algn="l">
@@ -40649,7 +40697,7 @@
               <a:buFontTx/>
             </a:pPr>
             <a:r>
-              <a:rPr lang="en-US" altLang="zh-CN" sz="1200"/>
+              <a:rPr lang="en-US" altLang="zh-CN" sz="1200" dirty="0"/>
               <a:t>Statistically significant differences are highlighted in bold (at the 5% level) and with an asterisk for comparisons passing the Bonferroni correction.</a:t>
             </a:r>
           </a:p>
